--- a/decks/maths-perimeter-area/maths-perimeter-area_ch6_expressions.pptx
+++ b/decks/maths-perimeter-area/maths-perimeter-area_ch6_expressions.pptx
@@ -122,29 +122,29 @@
   <p:extLst>
     <p:ext uri="{521415D9-36F7-43E2-AB2F-B90AF26B5E84}">
       <p14:sectionLst xmlns:p14="http://schemas.microsoft.com/office/powerpoint/2010/main">
-        <p14:section name="Opening" id="{e1481588-d973-54a0-65b4-7b005d9e59ef}">
+        <p14:section name="Opening" id="{708eaa40-61b2-76af-b2bd-56b9665fbae0}">
           <p14:sldIdLst>
             <p14:sldId id="256"/>
           </p14:sldIdLst>
         </p14:section>
-        <p14:section name="Gate" id="{65a92e29-0b79-ae34-17ca-773e58664439}">
+        <p14:section name="Gate" id="{667534fd-3538-b48b-1642-c1ed4712291d}">
           <p14:sldIdLst>
             <p14:sldId id="257"/>
             <p14:sldId id="258"/>
           </p14:sldIdLst>
         </p14:section>
-        <p14:section name="Pre-teach" id="{1ac7f98d-46ec-9802-1fa2-79f8d4d8e924}">
+        <p14:section name="Pre-teach" id="{ce4c5de6-227a-66cd-54bc-6e667ffa6d76}">
           <p14:sldIdLst>
             <p14:sldId id="259"/>
           </p14:sldIdLst>
         </p14:section>
-        <p14:section name="Read-along" id="{7effc79c-2a3f-574e-b79d-6d9a3a3998f5}">
+        <p14:section name="Read-along" id="{98df4379-efd3-719f-b418-882a71933e3b}">
           <p14:sldIdLst>
             <p14:sldId id="260"/>
             <p14:sldId id="261"/>
           </p14:sldIdLst>
         </p14:section>
-        <p14:section name="Teach" id="{94dabb61-8316-bd02-76e2-4ca674dd6623}">
+        <p14:section name="Teach" id="{7abc2d45-ad9a-fd42-31e0-c102937df17e}">
           <p14:sldIdLst>
             <p14:sldId id="262"/>
             <p14:sldId id="263"/>
@@ -152,18 +152,18 @@
             <p14:sldId id="265"/>
           </p14:sldIdLst>
         </p14:section>
-        <p14:section name="Routes" id="{d662b0e2-59f0-56da-bd55-faab4fc28174}">
+        <p14:section name="Routes" id="{bba86a6d-fd48-f965-a620-2e7d91a9087f}">
           <p14:sldIdLst>
             <p14:sldId id="266"/>
             <p14:sldId id="267"/>
           </p14:sldIdLst>
         </p14:section>
-        <p14:section name="Close" id="{53c8a075-75d0-deba-d587-5a0155f97721}">
+        <p14:section name="Close" id="{eb20a1ae-c895-9f71-c08b-1b30918d7eab}">
           <p14:sldIdLst>
             <p14:sldId id="268"/>
           </p14:sldIdLst>
         </p14:section>
-        <p14:section name="Answers" id="{36040190-33dd-4b12-a3fc-b8b7ec60b295}">
+        <p14:section name="Answers" id="{c3947b01-7454-bac8-08cb-1a9add4db0f7}">
           <p14:sldIdLst>
             <p14:sldId id="269"/>
             <p14:sldId id="270"/>
@@ -948,7 +948,7 @@
               <a:rPr lang="en-US" dirty="0"/>
               <a:t>Exit ticket — individual, silent, on a slip or mini-whiteboard. Recall before help: no notes, no lanes, no hints. Collect before pupils leave.
 Question: A triangle has a base of 6y cm and a perpendicular height of 4 cm. Which expression gives its area in cm²?
-Answer: B   12y. 6y × 4 is 24y, and a triangle is half a rectangle, so the area is 12y. There is no y² because only the base has a y.
+Answer: C   12y. 6y × 4 is 24y, and a triangle is half a rectangle, so the area is 12y. There is no y² because only the base has a y.
 Source of this question: module 3 task ("Area expression for a triangle") from the manifest.
 Sort the slips: correct → ready to move on; incorrect → start next lesson in the pre-teach group, with the read-along and the Support lane. Same destination next time.</a:t>
             </a:r>
@@ -1039,7 +1039,7 @@
             <a:r>
               <a:rPr lang="en-US" dirty="0"/>
               <a:t>Answers — task 1: Perimeter expression for a rectangle. Reveal the answer; pupils mark their own work in a different colour, then read the "why" together. Same destination for every lane, so one answer serves the whole class.
-Answer: B   10x + 6
+Answer: D   10x + 6
 Why: The four sides are 5x, 3, 5x and 3. Collect like terms: 5x + 5x is 10x and 3 + 3 = 6, so the perimeter is 10x + 6.
 Ask a Support pupil to explain one step, and a Stretch pupil to share their extension.</a:t>
             </a:r>
@@ -1221,7 +1221,7 @@
             <a:r>
               <a:rPr lang="en-US" dirty="0"/>
               <a:t>Answers — exit ticket: Exit ticket. Reveal the answer; pupils mark their own work in a different colour, then read the "why" together. Same destination for every lane, so one answer serves the whole class.
-Answer: B   12y
+Answer: C   12y
 Why: 6y × 4 is 24y, and a triangle is half a rectangle, so the area is 12y. There is no y² because only the base has a y.
 Ask a Support pupil to explain one step, and a Stretch pupil to share their extension.</a:t>
             </a:r>
@@ -1312,9 +1312,9 @@
             <a:r>
               <a:rPr lang="en-US" dirty="0"/>
               <a:t>Do now — retrieval. Silent, no notes, no help: recall comes before any support. Give about four minutes.
-1. Simplify a + a + a + a + a.  →  A   5a
+1. Simplify a + a + a + a + a.  →  C   5a
 2. The perimeter of a square with sides of length y is ___.  →  4y
-3. A rectangle has sides of 3b and 2b. What is its area?  →  C   6b²
+3. A rectangle has sides of 3b and 2b. What is its area?  →  A   6b²
 Circulate: who gets 3/3 (Stretch route), 2/3 (Core), 0–1 (Support)? Use this to route pupils later in the lesson.</a:t>
             </a:r>
             <a:endParaRPr lang="en-US" dirty="0"/>
@@ -1404,9 +1404,9 @@
             <a:r>
               <a:rPr lang="en-US" dirty="0"/>
               <a:t>Answers — pupils mark their own in a different colour, then hands up for 3/3, 2/3, 1/3.
-1. A   5a. Five lots of a added together is 5 × a, written 5a.
+1. C   5a. Five lots of a added together is 5 × a, written 5a.
 2. 4y. A square has four sides of y, so the perimeter is y + y + y + y = 4y.
-3. C   6b². 3b × 2b: multiply the numbers, 3 × 2 = 6, and the letters, b × b is b². So the area is 6b².
+3. A   6b². 3b × 2b: multiply the numbers, 3 × 2 = 6, and the letters, b × b is b². So the area is 6b².
 Say the route each score points to: 3/3 Stretch, 2/3 Core, 0–1 Support. Pupils may choose to move up.</a:t>
             </a:r>
             <a:endParaRPr lang="en-US" dirty="0"/>
@@ -5001,6 +5001,34 @@
                 <a:ea typeface="Calibri" pitchFamily="34" charset="-122"/>
                 <a:cs typeface="Calibri" pitchFamily="34" charset="-120"/>
               </a:rPr>
+              <a:t>8x      </a:t>
+            </a:r>
+            <a:pPr algn="ctr" indent="0" marL="0">
+              <a:buNone/>
+            </a:pPr>
+            <a:r>
+              <a:rPr lang="en-US" sz="1800" b="1" dirty="0">
+                <a:solidFill>
+                  <a:srgbClr val="B8862B"/>
+                </a:solidFill>
+                <a:latin typeface="Calibri" pitchFamily="34" charset="0"/>
+                <a:ea typeface="Calibri" pitchFamily="34" charset="-122"/>
+                <a:cs typeface="Calibri" pitchFamily="34" charset="-120"/>
+              </a:rPr>
+              <a:t>B  </a:t>
+            </a:r>
+            <a:pPr algn="ctr" indent="0" marL="0">
+              <a:buNone/>
+            </a:pPr>
+            <a:r>
+              <a:rPr lang="en-US" sz="1800" dirty="0">
+                <a:solidFill>
+                  <a:srgbClr val="1E2229"/>
+                </a:solidFill>
+                <a:latin typeface="Calibri" pitchFamily="34" charset="0"/>
+                <a:ea typeface="Calibri" pitchFamily="34" charset="-122"/>
+                <a:cs typeface="Calibri" pitchFamily="34" charset="-120"/>
+              </a:rPr>
               <a:t>5x + 3      </a:t>
             </a:r>
             <a:pPr algn="ctr" indent="0" marL="0">
@@ -5015,7 +5043,7 @@
                 <a:ea typeface="Calibri" pitchFamily="34" charset="-122"/>
                 <a:cs typeface="Calibri" pitchFamily="34" charset="-120"/>
               </a:rPr>
-              <a:t>B  </a:t>
+              <a:t>C  </a:t>
             </a:r>
             <a:pPr algn="ctr" indent="0" marL="0">
               <a:buNone/>
@@ -5029,7 +5057,7 @@
                 <a:ea typeface="Calibri" pitchFamily="34" charset="-122"/>
                 <a:cs typeface="Calibri" pitchFamily="34" charset="-120"/>
               </a:rPr>
-              <a:t>10x + 6      </a:t>
+              <a:t>15x      </a:t>
             </a:r>
             <a:pPr algn="ctr" indent="0" marL="0">
               <a:buNone/>
@@ -5043,7 +5071,7 @@
                 <a:ea typeface="Calibri" pitchFamily="34" charset="-122"/>
                 <a:cs typeface="Calibri" pitchFamily="34" charset="-120"/>
               </a:rPr>
-              <a:t>C  </a:t>
+              <a:t>D  </a:t>
             </a:r>
             <a:pPr algn="ctr" indent="0" marL="0">
               <a:buNone/>
@@ -5057,35 +5085,7 @@
                 <a:ea typeface="Calibri" pitchFamily="34" charset="-122"/>
                 <a:cs typeface="Calibri" pitchFamily="34" charset="-120"/>
               </a:rPr>
-              <a:t>15x      </a:t>
-            </a:r>
-            <a:pPr algn="ctr" indent="0" marL="0">
-              <a:buNone/>
-            </a:pPr>
-            <a:r>
-              <a:rPr lang="en-US" sz="1800" b="1" dirty="0">
-                <a:solidFill>
-                  <a:srgbClr val="B8862B"/>
-                </a:solidFill>
-                <a:latin typeface="Calibri" pitchFamily="34" charset="0"/>
-                <a:ea typeface="Calibri" pitchFamily="34" charset="-122"/>
-                <a:cs typeface="Calibri" pitchFamily="34" charset="-120"/>
-              </a:rPr>
-              <a:t>D  </a:t>
-            </a:r>
-            <a:pPr algn="ctr" indent="0" marL="0">
-              <a:buNone/>
-            </a:pPr>
-            <a:r>
-              <a:rPr lang="en-US" sz="1800" dirty="0">
-                <a:solidFill>
-                  <a:srgbClr val="1E2229"/>
-                </a:solidFill>
-                <a:latin typeface="Calibri" pitchFamily="34" charset="0"/>
-                <a:ea typeface="Calibri" pitchFamily="34" charset="-122"/>
-                <a:cs typeface="Calibri" pitchFamily="34" charset="-120"/>
-              </a:rPr>
-              <a:t>8x</a:t>
+              <a:t>10x + 6</a:t>
             </a:r>
             <a:endParaRPr lang="en-US" sz="2000" dirty="0"/>
           </a:p>
@@ -7134,7 +7134,7 @@
                 <a:ea typeface="Calibri" pitchFamily="34" charset="-122"/>
                 <a:cs typeface="Calibri" pitchFamily="34" charset="-120"/>
               </a:rPr>
-              <a:t>12y</a:t>
+              <a:t>10y</a:t>
             </a:r>
             <a:endParaRPr lang="en-US" sz="2400" dirty="0"/>
           </a:p>
@@ -7171,7 +7171,7 @@
                 <a:ea typeface="Calibri" pitchFamily="34" charset="-122"/>
                 <a:cs typeface="Calibri" pitchFamily="34" charset="-120"/>
               </a:rPr>
-              <a:t>10y</a:t>
+              <a:t>12y</a:t>
             </a:r>
             <a:endParaRPr lang="en-US" sz="2400" dirty="0"/>
           </a:p>
@@ -7613,7 +7613,7 @@
                 <a:ea typeface="Cambria" pitchFamily="34" charset="-122"/>
                 <a:cs typeface="Cambria" pitchFamily="34" charset="-120"/>
               </a:rPr>
-              <a:t>B   10x + 6</a:t>
+              <a:t>D   10x + 6</a:t>
             </a:r>
             <a:endParaRPr lang="en-US" sz="1800" dirty="0"/>
           </a:p>
@@ -8531,7 +8531,7 @@
                 <a:ea typeface="Cambria" pitchFamily="34" charset="-122"/>
                 <a:cs typeface="Cambria" pitchFamily="34" charset="-120"/>
               </a:rPr>
-              <a:t>B   12y</a:t>
+              <a:t>C   12y</a:t>
             </a:r>
             <a:endParaRPr lang="en-US" sz="1800" dirty="0"/>
           </a:p>
@@ -9065,7 +9065,7 @@
                 <a:ea typeface="Calibri" pitchFamily="34" charset="-122"/>
                 <a:cs typeface="Calibri" pitchFamily="34" charset="-120"/>
               </a:rPr>
-              <a:t>5a</a:t>
+              <a:t>a + 5</a:t>
             </a:r>
             <a:endParaRPr lang="en-US" sz="2400" dirty="0"/>
           </a:p>
@@ -9102,7 +9102,7 @@
                 <a:ea typeface="Calibri" pitchFamily="34" charset="-122"/>
                 <a:cs typeface="Calibri" pitchFamily="34" charset="-120"/>
               </a:rPr>
-              <a:t>a⁵</a:t>
+              <a:t>4a</a:t>
             </a:r>
             <a:endParaRPr lang="en-US" sz="2400" dirty="0"/>
           </a:p>
@@ -9139,7 +9139,7 @@
                 <a:ea typeface="Calibri" pitchFamily="34" charset="-122"/>
                 <a:cs typeface="Calibri" pitchFamily="34" charset="-120"/>
               </a:rPr>
-              <a:t>a + 5</a:t>
+              <a:t>5a</a:t>
             </a:r>
             <a:endParaRPr lang="en-US" sz="2400" dirty="0"/>
           </a:p>
@@ -9176,7 +9176,7 @@
                 <a:ea typeface="Calibri" pitchFamily="34" charset="-122"/>
                 <a:cs typeface="Calibri" pitchFamily="34" charset="-120"/>
               </a:rPr>
-              <a:t>4a</a:t>
+              <a:t>a⁵</a:t>
             </a:r>
             <a:endParaRPr lang="en-US" sz="2400" dirty="0"/>
           </a:p>
@@ -9578,7 +9578,7 @@
                 <a:ea typeface="Calibri" pitchFamily="34" charset="-122"/>
                 <a:cs typeface="Calibri" pitchFamily="34" charset="-120"/>
               </a:rPr>
-              <a:t>5b</a:t>
+              <a:t>6b²</a:t>
             </a:r>
             <a:endParaRPr lang="en-US" sz="2400" dirty="0"/>
           </a:p>
@@ -9615,7 +9615,7 @@
                 <a:ea typeface="Calibri" pitchFamily="34" charset="-122"/>
                 <a:cs typeface="Calibri" pitchFamily="34" charset="-120"/>
               </a:rPr>
-              <a:t>6b</a:t>
+              <a:t>5b</a:t>
             </a:r>
             <a:endParaRPr lang="en-US" sz="2400" dirty="0"/>
           </a:p>
@@ -9652,7 +9652,7 @@
                 <a:ea typeface="Calibri" pitchFamily="34" charset="-122"/>
                 <a:cs typeface="Calibri" pitchFamily="34" charset="-120"/>
               </a:rPr>
-              <a:t>6b²</a:t>
+              <a:t>10b</a:t>
             </a:r>
             <a:endParaRPr lang="en-US" sz="2400" dirty="0"/>
           </a:p>
@@ -9689,7 +9689,7 @@
                 <a:ea typeface="Calibri" pitchFamily="34" charset="-122"/>
                 <a:cs typeface="Calibri" pitchFamily="34" charset="-120"/>
               </a:rPr>
-              <a:t>10b</a:t>
+              <a:t>6b</a:t>
             </a:r>
             <a:endParaRPr lang="en-US" sz="2400" dirty="0"/>
           </a:p>
@@ -10090,7 +10090,7 @@
                 <a:ea typeface="Calibri" pitchFamily="34" charset="-122"/>
                 <a:cs typeface="Calibri" pitchFamily="34" charset="-120"/>
               </a:rPr>
-              <a:t>A   5a</a:t>
+              <a:t>C   5a</a:t>
             </a:r>
             <a:endParaRPr lang="en-US" sz="2200" dirty="0"/>
           </a:p>
@@ -10590,7 +10590,7 @@
                 <a:ea typeface="Calibri" pitchFamily="34" charset="-122"/>
                 <a:cs typeface="Calibri" pitchFamily="34" charset="-120"/>
               </a:rPr>
-              <a:t>C   6b²</a:t>
+              <a:t>A   6b²</a:t>
             </a:r>
             <a:endParaRPr lang="en-US" sz="2200" dirty="0"/>
           </a:p>

--- a/decks/maths-perimeter-area/maths-perimeter-area_ch6_expressions.pptx
+++ b/decks/maths-perimeter-area/maths-perimeter-area_ch6_expressions.pptx
@@ -122,29 +122,29 @@
   <p:extLst>
     <p:ext uri="{521415D9-36F7-43E2-AB2F-B90AF26B5E84}">
       <p14:sectionLst xmlns:p14="http://schemas.microsoft.com/office/powerpoint/2010/main">
-        <p14:section name="Opening" id="{708eaa40-61b2-76af-b2bd-56b9665fbae0}">
+        <p14:section name="Opening" id="{823e239f-e349-874c-364b-1ffed1b1b12f}">
           <p14:sldIdLst>
             <p14:sldId id="256"/>
           </p14:sldIdLst>
         </p14:section>
-        <p14:section name="Gate" id="{667534fd-3538-b48b-1642-c1ed4712291d}">
+        <p14:section name="Gate" id="{77e10862-a1e0-c3c3-56e6-870042f78956}">
           <p14:sldIdLst>
             <p14:sldId id="257"/>
             <p14:sldId id="258"/>
           </p14:sldIdLst>
         </p14:section>
-        <p14:section name="Pre-teach" id="{ce4c5de6-227a-66cd-54bc-6e667ffa6d76}">
+        <p14:section name="Pre-teach" id="{44ea9d6d-484d-cf3f-f761-58bd7bc0442a}">
           <p14:sldIdLst>
             <p14:sldId id="259"/>
           </p14:sldIdLst>
         </p14:section>
-        <p14:section name="Read-along" id="{98df4379-efd3-719f-b418-882a71933e3b}">
+        <p14:section name="Read-along" id="{b63a84e1-91bf-2787-1217-eff4174d25b2}">
           <p14:sldIdLst>
             <p14:sldId id="260"/>
             <p14:sldId id="261"/>
           </p14:sldIdLst>
         </p14:section>
-        <p14:section name="Teach" id="{7abc2d45-ad9a-fd42-31e0-c102937df17e}">
+        <p14:section name="Teach" id="{d0b00bcd-1de3-c8f8-9a2e-1b74ea490ca9}">
           <p14:sldIdLst>
             <p14:sldId id="262"/>
             <p14:sldId id="263"/>
@@ -152,18 +152,18 @@
             <p14:sldId id="265"/>
           </p14:sldIdLst>
         </p14:section>
-        <p14:section name="Routes" id="{bba86a6d-fd48-f965-a620-2e7d91a9087f}">
+        <p14:section name="Routes" id="{9e2ca2b6-5912-2931-d2de-480807770275}">
           <p14:sldIdLst>
             <p14:sldId id="266"/>
             <p14:sldId id="267"/>
           </p14:sldIdLst>
         </p14:section>
-        <p14:section name="Close" id="{eb20a1ae-c895-9f71-c08b-1b30918d7eab}">
+        <p14:section name="Close" id="{3cb9f5ec-56db-112a-8719-c91d599f26e0}">
           <p14:sldIdLst>
             <p14:sldId id="268"/>
           </p14:sldIdLst>
         </p14:section>
-        <p14:section name="Answers" id="{c3947b01-7454-bac8-08cb-1a9add4db0f7}">
+        <p14:section name="Answers" id="{cbc736a2-90bb-875b-18ee-457bad2b7657}">
           <p14:sldIdLst>
             <p14:sldId id="269"/>
             <p14:sldId id="270"/>
